--- a/lectures/Session02-Divergent.pptx
+++ b/lectures/Session02-Divergent.pptx
@@ -513,7 +513,7 @@
           <a:p>
             <a:r>
               <a:rPr lang="en-US" dirty="0"/>
-              <a:t>First true workshop and first session with pre-reading. Minimal lecture, maximum doing.</a:t>
+              <a:t>First true workshop, and the first session that assumed pre-reading (the CPS handbook excerpt and Elder Hales). Set expectations immediately: minimal lecture, maximum doing — today they practice the CPS process, then turn it on the real world to generate problems. Keep the energy up; this is a hands-on day. ~1 min.</a:t>
             </a:r>
             <a:endParaRPr lang="en-US" dirty="0"/>
           </a:p>
@@ -601,7 +601,7 @@
           <a:p>
             <a:r>
               <a:rPr lang="en-US" dirty="0"/>
-              <a:t>Leave this up during the workshop. Return to it whenever energy or focus dips.</a:t>
+              <a:t>Leave this slide up during the entire workshop — it's the reference, not a talking point. Return to it out loud whenever energy dips or someone starts solutioning: problems not solutions, defer judgment, prefer quantity, build on others', welcome wild ideas. The 40+ per group target gives them something concrete to chase. Keep reinforcing "tag who feels each one." (Stays up while they work.)</a:t>
             </a:r>
             <a:endParaRPr lang="en-US" dirty="0"/>
           </a:p>
@@ -689,7 +689,7 @@
           <a:p>
             <a:r>
               <a:rPr lang="en-US" dirty="0"/>
-              <a:t/>
+              <a:t>Before anyone leaves, land the capture routine so the work isn't lost. Have them star 3-5 problem spaces that tug at them — a private, gentle first narrowing weighing value against reachable users. Everything, starred or not, goes into the idea journal as raw material for the Idea Briefs. Stress that starring is NOT a commitment to a project; range still matters. ~2-3 min.</a:t>
             </a:r>
             <a:endParaRPr lang="en-US" dirty="0"/>
           </a:p>
@@ -777,7 +777,7 @@
           <a:p>
             <a:r>
               <a:rPr lang="en-US" dirty="0"/>
-              <a:t>Preview Week 2 (Mon Sep 14): open source, licensing, and discovery methods. They bring their starred problems into needfinding.</a:t>
+              <a:t>Close by reinforcing the habit: keep noticing, because they need genuine range for three different Idea Briefs. Preview Monday, Sep 14: open source, licensing, and discovery — how to talk to real users. Ask them to bring their starred problem spaces into needfinding. ~1-2 min.</a:t>
             </a:r>
             <a:endParaRPr lang="en-US" dirty="0"/>
           </a:p>
@@ -865,7 +865,7 @@
           <a:p>
             <a:r>
               <a:rPr lang="en-US" dirty="0"/>
-              <a:t/>
+              <a:t>Quick recap from Session 1: CPS means generate many options, then narrow — divergent opens up, convergent chooses. Then run the journal check-in as a live temperature read: "how many entries so far?", hands up by range. Celebrate quantity and don't judge quality — volume is the whole point right now, and they'll add a lot more today. If entries look thin, gently reset the expectation before you move on. ~2-3 min.</a:t>
             </a:r>
             <a:endParaRPr lang="en-US" dirty="0"/>
           </a:p>
@@ -953,7 +953,7 @@
           <a:p>
             <a:r>
               <a:rPr lang="en-US" dirty="0"/>
-              <a:t/>
+              <a:t>This is now review from the reading, not new material — move briskly and check comprehension rather than lecturing. Name the four stages with a line each, and ask the room to supply the definitions if they did the reading. Land the banner: every stage uses both divergent and convergent thinking. Keep it to a few minutes; the doing is what matters today. ~3 min.</a:t>
             </a:r>
             <a:endParaRPr lang="en-US" dirty="0"/>
           </a:p>
@@ -1041,7 +1041,7 @@
           <a:p>
             <a:r>
               <a:rPr lang="en-US" dirty="0"/>
-              <a:t/>
+              <a:t>A short discussion beat tied to the Hales reading. The CPS handbook gives the mechanics; Hales speaks to the purpose — creativity as a gift to develop and use in service, not just a technique. Pose the questions and let students talk; resist filling the silence too quickly. Aim to connect that sense of purpose to how they'll choose a project worth founding. ~4-5 min.</a:t>
             </a:r>
             <a:endParaRPr lang="en-US" dirty="0"/>
           </a:p>
@@ -1129,7 +1129,7 @@
           <a:p>
             <a:r>
               <a:rPr lang="en-US" dirty="0"/>
-              <a:t>Introduce, don't drill. We'll lean on Post-It, brainwriting, and the ladder in the workshop; Value vs. Do-ability returns when we narrow.</a:t>
+              <a:t>Introduce the toolkit — don't drill each tool. Name each one and its mode: Post-It burst and brainwriting and "how might we" (diverge), the ladder of abstraction (both), and Value vs. Do-ability (converge). Tell them today leans on Post-It, brainwriting, and the ladder, and that Value vs. Do-ability returns in Week 3 when they narrow. This is a reference slide — keep it short. ~2 min.</a:t>
             </a:r>
             <a:endParaRPr lang="en-US" dirty="0"/>
           </a:p>
@@ -1217,7 +1217,7 @@
           <a:p>
             <a:r>
               <a:rPr lang="en-US" dirty="0"/>
-              <a:t/>
+              <a:t>Set up the warm-up clearly: it exists to make the CPS process VISIBLE, not to build anything — paper only, design and reason, no drop. Walk the three beats: Clarify (just the goal for now), Ideate (generate wild protection ideas, no constraints yet), Develop (constraints appear, narrow to one). Put them in groups of 3-4 with a facilitator each. The trap you WANT them to fall into is not asking about constraints early. ~3 min to set up.</a:t>
             </a:r>
             <a:endParaRPr lang="en-US" dirty="0"/>
           </a:p>
@@ -1305,7 +1305,7 @@
           <a:p>
             <a:r>
               <a:rPr lang="en-US" dirty="0"/>
-              <a:t>Reveal at Development — or earlier to any team that asks good Clarification questions. The wild ideas (giant pillow, huge parachute) now meet real limits, forcing convergence.</a:t>
+              <a:t>Do not show this until the Development stage — OR reward any team that asks good Clarification questions by revealing it to them early; that reward IS the lesson. When it appears, their wild ideas (giant pillow, huge parachute) suddenly meet real limits, forcing convergence. Read the constraints once, then let them narrow to a single design. This is where "understand constraints before solutioning" gets felt rather than told. The exercise runs ~10-12 min total.</a:t>
             </a:r>
             <a:endParaRPr lang="en-US" dirty="0"/>
           </a:p>
@@ -1393,7 +1393,7 @@
           <a:p>
             <a:r>
               <a:rPr lang="en-US" dirty="0"/>
-              <a:t/>
+              <a:t>The payoff slide — draw the lesson OUT of them rather than stating it. Ask which teams asked about constraints early and how much easier it made things. The Clarification lesson: real founding work starts by understanding the problem, its users, and its constraints before racing to solutions. Then pivot: the same divergent discipline — generate widely, defer judgment — is exactly how we'll find real problems worth founding on. ~3-4 min.</a:t>
             </a:r>
             <a:endParaRPr lang="en-US" dirty="0"/>
           </a:p>
@@ -1481,7 +1481,7 @@
           <a:p>
             <a:r>
               <a:rPr lang="en-US" dirty="0"/>
-              <a:t/>
+              <a:t>The main event. Three tools, one growing pool, run back to back: breadth (Post-It burst, ~9 min), build (brainwriting, ~9 min), depth (ladder, ~7 min). Explain each briefly, then GO — keep transitions crisp so momentum builds, and circulate as a coach, pushing teams past the obvious. Have them tag WHO feels each problem — a specific person or group, not "everyone"; deep needfinding is next week. ~25 min total.</a:t>
             </a:r>
             <a:endParaRPr lang="en-US" dirty="0"/>
           </a:p>
